--- a/.lessons/56 Category, Subcategory and Child Category Setup/16 Child Category- Show created data at datatables/1.pptx
+++ b/.lessons/56 Category, Subcategory and Child Category Setup/16 Child Category- Show created data at datatables/1.pptx
@@ -8,6 +8,11 @@
     <p:sldId id="413" r:id="rId2"/>
     <p:sldId id="414" r:id="rId3"/>
     <p:sldId id="400" r:id="rId4"/>
+    <p:sldId id="415" r:id="rId5"/>
+    <p:sldId id="416" r:id="rId6"/>
+    <p:sldId id="417" r:id="rId7"/>
+    <p:sldId id="418" r:id="rId8"/>
+    <p:sldId id="419" r:id="rId9"/>
   </p:sldIdLst>
   <p:sldSz cx="12192000" cy="6858000"/>
   <p:notesSz cx="6858000" cy="9144000"/>
@@ -261,7 +266,7 @@
           <a:p>
             <a:fld id="{3E102D2E-813C-461C-9963-687A650C48C0}" type="datetimeFigureOut">
               <a:rPr lang="en-US" smtClean="0"/>
-              <a:t>6/26/2025</a:t>
+              <a:t>8/27/2025</a:t>
             </a:fld>
             <a:endParaRPr lang="en-US"/>
           </a:p>
@@ -459,7 +464,7 @@
           <a:p>
             <a:fld id="{3E102D2E-813C-461C-9963-687A650C48C0}" type="datetimeFigureOut">
               <a:rPr lang="en-US" smtClean="0"/>
-              <a:t>6/26/2025</a:t>
+              <a:t>8/27/2025</a:t>
             </a:fld>
             <a:endParaRPr lang="en-US"/>
           </a:p>
@@ -667,7 +672,7 @@
           <a:p>
             <a:fld id="{3E102D2E-813C-461C-9963-687A650C48C0}" type="datetimeFigureOut">
               <a:rPr lang="en-US" smtClean="0"/>
-              <a:t>6/26/2025</a:t>
+              <a:t>8/27/2025</a:t>
             </a:fld>
             <a:endParaRPr lang="en-US"/>
           </a:p>
@@ -865,7 +870,7 @@
           <a:p>
             <a:fld id="{3E102D2E-813C-461C-9963-687A650C48C0}" type="datetimeFigureOut">
               <a:rPr lang="en-US" smtClean="0"/>
-              <a:t>6/26/2025</a:t>
+              <a:t>8/27/2025</a:t>
             </a:fld>
             <a:endParaRPr lang="en-US"/>
           </a:p>
@@ -1140,7 +1145,7 @@
           <a:p>
             <a:fld id="{3E102D2E-813C-461C-9963-687A650C48C0}" type="datetimeFigureOut">
               <a:rPr lang="en-US" smtClean="0"/>
-              <a:t>6/26/2025</a:t>
+              <a:t>8/27/2025</a:t>
             </a:fld>
             <a:endParaRPr lang="en-US"/>
           </a:p>
@@ -1405,7 +1410,7 @@
           <a:p>
             <a:fld id="{3E102D2E-813C-461C-9963-687A650C48C0}" type="datetimeFigureOut">
               <a:rPr lang="en-US" smtClean="0"/>
-              <a:t>6/26/2025</a:t>
+              <a:t>8/27/2025</a:t>
             </a:fld>
             <a:endParaRPr lang="en-US"/>
           </a:p>
@@ -1817,7 +1822,7 @@
           <a:p>
             <a:fld id="{3E102D2E-813C-461C-9963-687A650C48C0}" type="datetimeFigureOut">
               <a:rPr lang="en-US" smtClean="0"/>
-              <a:t>6/26/2025</a:t>
+              <a:t>8/27/2025</a:t>
             </a:fld>
             <a:endParaRPr lang="en-US"/>
           </a:p>
@@ -1958,7 +1963,7 @@
           <a:p>
             <a:fld id="{3E102D2E-813C-461C-9963-687A650C48C0}" type="datetimeFigureOut">
               <a:rPr lang="en-US" smtClean="0"/>
-              <a:t>6/26/2025</a:t>
+              <a:t>8/27/2025</a:t>
             </a:fld>
             <a:endParaRPr lang="en-US"/>
           </a:p>
@@ -2071,7 +2076,7 @@
           <a:p>
             <a:fld id="{3E102D2E-813C-461C-9963-687A650C48C0}" type="datetimeFigureOut">
               <a:rPr lang="en-US" smtClean="0"/>
-              <a:t>6/26/2025</a:t>
+              <a:t>8/27/2025</a:t>
             </a:fld>
             <a:endParaRPr lang="en-US"/>
           </a:p>
@@ -2382,7 +2387,7 @@
           <a:p>
             <a:fld id="{3E102D2E-813C-461C-9963-687A650C48C0}" type="datetimeFigureOut">
               <a:rPr lang="en-US" smtClean="0"/>
-              <a:t>6/26/2025</a:t>
+              <a:t>8/27/2025</a:t>
             </a:fld>
             <a:endParaRPr lang="en-US"/>
           </a:p>
@@ -2670,7 +2675,7 @@
           <a:p>
             <a:fld id="{3E102D2E-813C-461C-9963-687A650C48C0}" type="datetimeFigureOut">
               <a:rPr lang="en-US" smtClean="0"/>
-              <a:t>6/26/2025</a:t>
+              <a:t>8/27/2025</a:t>
             </a:fld>
             <a:endParaRPr lang="en-US"/>
           </a:p>
@@ -2911,7 +2916,7 @@
           <a:p>
             <a:fld id="{3E102D2E-813C-461C-9963-687A650C48C0}" type="datetimeFigureOut">
               <a:rPr lang="en-US" smtClean="0"/>
-              <a:t>6/26/2025</a:t>
+              <a:t>8/27/2025</a:t>
             </a:fld>
             <a:endParaRPr lang="en-US"/>
           </a:p>
@@ -3369,21 +3374,54 @@
               <a:buNone/>
             </a:pPr>
             <a:r>
-              <a:rPr kumimoji="0" lang="en-US" altLang="en-US" sz="1300" b="0" i="0" u="none" strike="noStrike" cap="none" normalizeH="0" baseline="0">
-                <a:ln>
-                  <a:noFill/>
-                </a:ln>
-                <a:solidFill>
-                  <a:schemeClr val="tx1"/>
-                </a:solidFill>
-                <a:effectLst/>
+              <a:rPr lang="en-US" altLang="en-US" sz="1300">
                 <a:latin typeface="Arial" panose="020B0604020202020204" pitchFamily="34" charset="0"/>
               </a:rPr>
-              <a:t>.</a:t>
-            </a:r>
-          </a:p>
-        </p:txBody>
-      </p:sp>
+              <a:t>app\DataTables\ChildCategoryDataTable.php</a:t>
+            </a:r>
+            <a:endParaRPr kumimoji="0" lang="en-US" altLang="en-US" sz="1300" b="0" i="0" u="none" strike="noStrike" cap="none" normalizeH="0" baseline="0">
+              <a:ln>
+                <a:noFill/>
+              </a:ln>
+              <a:solidFill>
+                <a:schemeClr val="tx1"/>
+              </a:solidFill>
+              <a:effectLst/>
+              <a:latin typeface="Arial" panose="020B0604020202020204" pitchFamily="34" charset="0"/>
+            </a:endParaRPr>
+          </a:p>
+        </p:txBody>
+      </p:sp>
+      <p:pic>
+        <p:nvPicPr>
+          <p:cNvPr id="6" name="Picture 5">
+            <a:extLst>
+              <a:ext uri="{FF2B5EF4-FFF2-40B4-BE49-F238E27FC236}">
+                <a16:creationId xmlns:a16="http://schemas.microsoft.com/office/drawing/2014/main" id="{B0CD2900-764F-7EAE-3914-159C8453B3A6}"/>
+              </a:ext>
+            </a:extLst>
+          </p:cNvPr>
+          <p:cNvPicPr>
+            <a:picLocks noChangeAspect="1"/>
+          </p:cNvPicPr>
+          <p:nvPr/>
+        </p:nvPicPr>
+        <p:blipFill>
+          <a:blip r:embed="rId2"/>
+          <a:stretch>
+            <a:fillRect/>
+          </a:stretch>
+        </p:blipFill>
+        <p:spPr>
+          <a:xfrm>
+            <a:off x="7440656" y="0"/>
+            <a:ext cx="4751344" cy="6858000"/>
+          </a:xfrm>
+          <a:prstGeom prst="rect">
+            <a:avLst/>
+          </a:prstGeom>
+        </p:spPr>
+      </p:pic>
     </p:spTree>
     <p:extLst>
       <p:ext uri="{BB962C8B-B14F-4D97-AF65-F5344CB8AC3E}">
@@ -3455,21 +3493,54 @@
               <a:buNone/>
             </a:pPr>
             <a:r>
-              <a:rPr kumimoji="0" lang="en-US" altLang="en-US" sz="1300" b="0" i="0" u="none" strike="noStrike" cap="none" normalizeH="0" baseline="0">
-                <a:ln>
-                  <a:noFill/>
-                </a:ln>
-                <a:solidFill>
-                  <a:schemeClr val="tx1"/>
-                </a:solidFill>
-                <a:effectLst/>
+              <a:rPr lang="en-US" altLang="en-US" sz="1300">
                 <a:latin typeface="Arial" panose="020B0604020202020204" pitchFamily="34" charset="0"/>
               </a:rPr>
-              <a:t>.</a:t>
-            </a:r>
-          </a:p>
-        </p:txBody>
-      </p:sp>
+              <a:t>app\Models\ChildCategory.php</a:t>
+            </a:r>
+            <a:endParaRPr kumimoji="0" lang="en-US" altLang="en-US" sz="1300" b="0" i="0" u="none" strike="noStrike" cap="none" normalizeH="0" baseline="0">
+              <a:ln>
+                <a:noFill/>
+              </a:ln>
+              <a:solidFill>
+                <a:schemeClr val="tx1"/>
+              </a:solidFill>
+              <a:effectLst/>
+              <a:latin typeface="Arial" panose="020B0604020202020204" pitchFamily="34" charset="0"/>
+            </a:endParaRPr>
+          </a:p>
+        </p:txBody>
+      </p:sp>
+      <p:pic>
+        <p:nvPicPr>
+          <p:cNvPr id="10" name="Picture 9">
+            <a:extLst>
+              <a:ext uri="{FF2B5EF4-FFF2-40B4-BE49-F238E27FC236}">
+                <a16:creationId xmlns:a16="http://schemas.microsoft.com/office/drawing/2014/main" id="{B1B34902-63FA-BCB2-EA5B-8A6FD07F7DEE}"/>
+              </a:ext>
+            </a:extLst>
+          </p:cNvPr>
+          <p:cNvPicPr>
+            <a:picLocks noChangeAspect="1"/>
+          </p:cNvPicPr>
+          <p:nvPr/>
+        </p:nvPicPr>
+        <p:blipFill>
+          <a:blip r:embed="rId2"/>
+          <a:stretch>
+            <a:fillRect/>
+          </a:stretch>
+        </p:blipFill>
+        <p:spPr>
+          <a:xfrm>
+            <a:off x="3704891" y="956917"/>
+            <a:ext cx="4782217" cy="4944165"/>
+          </a:xfrm>
+          <a:prstGeom prst="rect">
+            <a:avLst/>
+          </a:prstGeom>
+        </p:spPr>
+      </p:pic>
     </p:spTree>
     <p:extLst>
       <p:ext uri="{BB962C8B-B14F-4D97-AF65-F5344CB8AC3E}">
@@ -3541,6 +3612,125 @@
               <a:buNone/>
             </a:pPr>
             <a:r>
+              <a:rPr lang="en-US" altLang="en-US" sz="1300">
+                <a:latin typeface="Arial" panose="020B0604020202020204" pitchFamily="34" charset="0"/>
+              </a:rPr>
+              <a:t>app\DataTables\ChildCategoryDataTable.php</a:t>
+            </a:r>
+            <a:endParaRPr kumimoji="0" lang="en-US" altLang="en-US" sz="1300" b="0" i="0" u="none" strike="noStrike" cap="none" normalizeH="0" baseline="0">
+              <a:ln>
+                <a:noFill/>
+              </a:ln>
+              <a:solidFill>
+                <a:schemeClr val="tx1"/>
+              </a:solidFill>
+              <a:effectLst/>
+              <a:latin typeface="Arial" panose="020B0604020202020204" pitchFamily="34" charset="0"/>
+            </a:endParaRPr>
+          </a:p>
+        </p:txBody>
+      </p:sp>
+      <p:pic>
+        <p:nvPicPr>
+          <p:cNvPr id="4" name="Picture 3">
+            <a:extLst>
+              <a:ext uri="{FF2B5EF4-FFF2-40B4-BE49-F238E27FC236}">
+                <a16:creationId xmlns:a16="http://schemas.microsoft.com/office/drawing/2014/main" id="{2AF362B1-0A5D-D039-F8A9-7AD0CB9481CE}"/>
+              </a:ext>
+            </a:extLst>
+          </p:cNvPr>
+          <p:cNvPicPr>
+            <a:picLocks noChangeAspect="1"/>
+          </p:cNvPicPr>
+          <p:nvPr/>
+        </p:nvPicPr>
+        <p:blipFill>
+          <a:blip r:embed="rId2"/>
+          <a:stretch>
+            <a:fillRect/>
+          </a:stretch>
+        </p:blipFill>
+        <p:spPr>
+          <a:xfrm>
+            <a:off x="7809737" y="0"/>
+            <a:ext cx="4382263" cy="6858000"/>
+          </a:xfrm>
+          <a:prstGeom prst="rect">
+            <a:avLst/>
+          </a:prstGeom>
+        </p:spPr>
+      </p:pic>
+    </p:spTree>
+    <p:extLst>
+      <p:ext uri="{BB962C8B-B14F-4D97-AF65-F5344CB8AC3E}">
+        <p14:creationId xmlns:p14="http://schemas.microsoft.com/office/powerpoint/2010/main" val="3095838342"/>
+      </p:ext>
+    </p:extLst>
+  </p:cSld>
+  <p:clrMapOvr>
+    <a:masterClrMapping/>
+  </p:clrMapOvr>
+</p:sld>
+</file>
+
+<file path=ppt/slides/slide4.xml><?xml version="1.0" encoding="utf-8"?>
+<p:sld xmlns:a="http://schemas.openxmlformats.org/drawingml/2006/main" xmlns:r="http://schemas.openxmlformats.org/officeDocument/2006/relationships" xmlns:p="http://schemas.openxmlformats.org/presentationml/2006/main">
+  <p:cSld>
+    <p:spTree>
+      <p:nvGrpSpPr>
+        <p:cNvPr id="1" name="">
+          <a:extLst>
+            <a:ext uri="{FF2B5EF4-FFF2-40B4-BE49-F238E27FC236}">
+              <a16:creationId xmlns:a16="http://schemas.microsoft.com/office/drawing/2014/main" id="{62310F6E-645D-8727-8B9D-1FEEA070EEF6}"/>
+            </a:ext>
+          </a:extLst>
+        </p:cNvPr>
+        <p:cNvGrpSpPr/>
+        <p:nvPr/>
+      </p:nvGrpSpPr>
+      <p:grpSpPr>
+        <a:xfrm>
+          <a:off x="0" y="0"/>
+          <a:ext cx="0" cy="0"/>
+          <a:chOff x="0" y="0"/>
+          <a:chExt cx="0" cy="0"/>
+        </a:xfrm>
+      </p:grpSpPr>
+      <p:sp>
+        <p:nvSpPr>
+          <p:cNvPr id="3" name="TextBox 2">
+            <a:extLst>
+              <a:ext uri="{FF2B5EF4-FFF2-40B4-BE49-F238E27FC236}">
+                <a16:creationId xmlns:a16="http://schemas.microsoft.com/office/drawing/2014/main" id="{456D6567-6E7B-301F-6C5A-AD3641A912D0}"/>
+              </a:ext>
+            </a:extLst>
+          </p:cNvPr>
+          <p:cNvSpPr txBox="1"/>
+          <p:nvPr/>
+        </p:nvSpPr>
+        <p:spPr>
+          <a:xfrm>
+            <a:off x="217714" y="255046"/>
+            <a:ext cx="11756571" cy="355354"/>
+          </a:xfrm>
+          <a:prstGeom prst="rect">
+            <a:avLst/>
+          </a:prstGeom>
+          <a:noFill/>
+        </p:spPr>
+        <p:txBody>
+          <a:bodyPr wrap="square">
+            <a:spAutoFit/>
+          </a:bodyPr>
+          <a:lstStyle/>
+          <a:p>
+            <a:pPr>
+              <a:lnSpc>
+                <a:spcPct val="150000"/>
+              </a:lnSpc>
+              <a:buNone/>
+            </a:pPr>
+            <a:r>
               <a:rPr kumimoji="0" lang="en-US" altLang="en-US" sz="1300" b="0" i="0" u="none" strike="noStrike" cap="none" normalizeH="0" baseline="0">
                 <a:ln>
                   <a:noFill/>
@@ -3556,10 +3746,494 @@
           </a:p>
         </p:txBody>
       </p:sp>
+      <p:pic>
+        <p:nvPicPr>
+          <p:cNvPr id="4" name="Picture 3">
+            <a:extLst>
+              <a:ext uri="{FF2B5EF4-FFF2-40B4-BE49-F238E27FC236}">
+                <a16:creationId xmlns:a16="http://schemas.microsoft.com/office/drawing/2014/main" id="{E789EA9B-25D6-B58E-469C-1F30C4031F08}"/>
+              </a:ext>
+            </a:extLst>
+          </p:cNvPr>
+          <p:cNvPicPr>
+            <a:picLocks noChangeAspect="1"/>
+          </p:cNvPicPr>
+          <p:nvPr/>
+        </p:nvPicPr>
+        <p:blipFill>
+          <a:blip r:embed="rId2"/>
+          <a:stretch>
+            <a:fillRect/>
+          </a:stretch>
+        </p:blipFill>
+        <p:spPr>
+          <a:xfrm>
+            <a:off x="-1" y="330051"/>
+            <a:ext cx="12192000" cy="6527949"/>
+          </a:xfrm>
+          <a:prstGeom prst="rect">
+            <a:avLst/>
+          </a:prstGeom>
+        </p:spPr>
+      </p:pic>
     </p:spTree>
     <p:extLst>
       <p:ext uri="{BB962C8B-B14F-4D97-AF65-F5344CB8AC3E}">
-        <p14:creationId xmlns:p14="http://schemas.microsoft.com/office/powerpoint/2010/main" val="3095838342"/>
+        <p14:creationId xmlns:p14="http://schemas.microsoft.com/office/powerpoint/2010/main" val="3577963065"/>
+      </p:ext>
+    </p:extLst>
+  </p:cSld>
+  <p:clrMapOvr>
+    <a:masterClrMapping/>
+  </p:clrMapOvr>
+</p:sld>
+</file>
+
+<file path=ppt/slides/slide5.xml><?xml version="1.0" encoding="utf-8"?>
+<p:sld xmlns:a="http://schemas.openxmlformats.org/drawingml/2006/main" xmlns:r="http://schemas.openxmlformats.org/officeDocument/2006/relationships" xmlns:p="http://schemas.openxmlformats.org/presentationml/2006/main">
+  <p:cSld>
+    <p:spTree>
+      <p:nvGrpSpPr>
+        <p:cNvPr id="1" name="">
+          <a:extLst>
+            <a:ext uri="{FF2B5EF4-FFF2-40B4-BE49-F238E27FC236}">
+              <a16:creationId xmlns:a16="http://schemas.microsoft.com/office/drawing/2014/main" id="{C5104CA8-95B7-8594-5F4E-BB08082F641C}"/>
+            </a:ext>
+          </a:extLst>
+        </p:cNvPr>
+        <p:cNvGrpSpPr/>
+        <p:nvPr/>
+      </p:nvGrpSpPr>
+      <p:grpSpPr>
+        <a:xfrm>
+          <a:off x="0" y="0"/>
+          <a:ext cx="0" cy="0"/>
+          <a:chOff x="0" y="0"/>
+          <a:chExt cx="0" cy="0"/>
+        </a:xfrm>
+      </p:grpSpPr>
+      <p:sp>
+        <p:nvSpPr>
+          <p:cNvPr id="3" name="TextBox 2">
+            <a:extLst>
+              <a:ext uri="{FF2B5EF4-FFF2-40B4-BE49-F238E27FC236}">
+                <a16:creationId xmlns:a16="http://schemas.microsoft.com/office/drawing/2014/main" id="{AB098972-5A62-96FC-F463-B928A908C18A}"/>
+              </a:ext>
+            </a:extLst>
+          </p:cNvPr>
+          <p:cNvSpPr txBox="1"/>
+          <p:nvPr/>
+        </p:nvSpPr>
+        <p:spPr>
+          <a:xfrm>
+            <a:off x="217714" y="255046"/>
+            <a:ext cx="11756571" cy="355354"/>
+          </a:xfrm>
+          <a:prstGeom prst="rect">
+            <a:avLst/>
+          </a:prstGeom>
+          <a:noFill/>
+        </p:spPr>
+        <p:txBody>
+          <a:bodyPr wrap="square">
+            <a:spAutoFit/>
+          </a:bodyPr>
+          <a:lstStyle/>
+          <a:p>
+            <a:pPr>
+              <a:lnSpc>
+                <a:spcPct val="150000"/>
+              </a:lnSpc>
+              <a:buNone/>
+            </a:pPr>
+            <a:r>
+              <a:rPr lang="en-US" altLang="en-US" sz="1300">
+                <a:latin typeface="Arial" panose="020B0604020202020204" pitchFamily="34" charset="0"/>
+              </a:rPr>
+              <a:t>app\DataTables\ChildCategoryDataTable.php</a:t>
+            </a:r>
+            <a:endParaRPr kumimoji="0" lang="en-US" altLang="en-US" sz="1300" b="0" i="0" u="none" strike="noStrike" cap="none" normalizeH="0" baseline="0">
+              <a:ln>
+                <a:noFill/>
+              </a:ln>
+              <a:solidFill>
+                <a:schemeClr val="tx1"/>
+              </a:solidFill>
+              <a:effectLst/>
+              <a:latin typeface="Arial" panose="020B0604020202020204" pitchFamily="34" charset="0"/>
+            </a:endParaRPr>
+          </a:p>
+        </p:txBody>
+      </p:sp>
+      <p:pic>
+        <p:nvPicPr>
+          <p:cNvPr id="4" name="Picture 3">
+            <a:extLst>
+              <a:ext uri="{FF2B5EF4-FFF2-40B4-BE49-F238E27FC236}">
+                <a16:creationId xmlns:a16="http://schemas.microsoft.com/office/drawing/2014/main" id="{FE596FEC-06B0-ED32-E6E5-014ABB257835}"/>
+              </a:ext>
+            </a:extLst>
+          </p:cNvPr>
+          <p:cNvPicPr>
+            <a:picLocks noChangeAspect="1"/>
+          </p:cNvPicPr>
+          <p:nvPr/>
+        </p:nvPicPr>
+        <p:blipFill>
+          <a:blip r:embed="rId2"/>
+          <a:stretch>
+            <a:fillRect/>
+          </a:stretch>
+        </p:blipFill>
+        <p:spPr>
+          <a:xfrm>
+            <a:off x="3731491" y="659394"/>
+            <a:ext cx="8460509" cy="6198605"/>
+          </a:xfrm>
+          <a:prstGeom prst="rect">
+            <a:avLst/>
+          </a:prstGeom>
+        </p:spPr>
+      </p:pic>
+    </p:spTree>
+    <p:extLst>
+      <p:ext uri="{BB962C8B-B14F-4D97-AF65-F5344CB8AC3E}">
+        <p14:creationId xmlns:p14="http://schemas.microsoft.com/office/powerpoint/2010/main" val="4186905015"/>
+      </p:ext>
+    </p:extLst>
+  </p:cSld>
+  <p:clrMapOvr>
+    <a:masterClrMapping/>
+  </p:clrMapOvr>
+</p:sld>
+</file>
+
+<file path=ppt/slides/slide6.xml><?xml version="1.0" encoding="utf-8"?>
+<p:sld xmlns:a="http://schemas.openxmlformats.org/drawingml/2006/main" xmlns:r="http://schemas.openxmlformats.org/officeDocument/2006/relationships" xmlns:p="http://schemas.openxmlformats.org/presentationml/2006/main">
+  <p:cSld>
+    <p:spTree>
+      <p:nvGrpSpPr>
+        <p:cNvPr id="1" name="">
+          <a:extLst>
+            <a:ext uri="{FF2B5EF4-FFF2-40B4-BE49-F238E27FC236}">
+              <a16:creationId xmlns:a16="http://schemas.microsoft.com/office/drawing/2014/main" id="{C994D00C-74F4-C0CB-AAED-E7A79B77AC0B}"/>
+            </a:ext>
+          </a:extLst>
+        </p:cNvPr>
+        <p:cNvGrpSpPr/>
+        <p:nvPr/>
+      </p:nvGrpSpPr>
+      <p:grpSpPr>
+        <a:xfrm>
+          <a:off x="0" y="0"/>
+          <a:ext cx="0" cy="0"/>
+          <a:chOff x="0" y="0"/>
+          <a:chExt cx="0" cy="0"/>
+        </a:xfrm>
+      </p:grpSpPr>
+      <p:sp>
+        <p:nvSpPr>
+          <p:cNvPr id="3" name="TextBox 2">
+            <a:extLst>
+              <a:ext uri="{FF2B5EF4-FFF2-40B4-BE49-F238E27FC236}">
+                <a16:creationId xmlns:a16="http://schemas.microsoft.com/office/drawing/2014/main" id="{17C4EBD8-733F-513F-F861-FCE6A0387A0C}"/>
+              </a:ext>
+            </a:extLst>
+          </p:cNvPr>
+          <p:cNvSpPr txBox="1"/>
+          <p:nvPr/>
+        </p:nvSpPr>
+        <p:spPr>
+          <a:xfrm>
+            <a:off x="217714" y="255046"/>
+            <a:ext cx="11756571" cy="355354"/>
+          </a:xfrm>
+          <a:prstGeom prst="rect">
+            <a:avLst/>
+          </a:prstGeom>
+          <a:noFill/>
+        </p:spPr>
+        <p:txBody>
+          <a:bodyPr wrap="square">
+            <a:spAutoFit/>
+          </a:bodyPr>
+          <a:lstStyle/>
+          <a:p>
+            <a:pPr>
+              <a:lnSpc>
+                <a:spcPct val="150000"/>
+              </a:lnSpc>
+              <a:buNone/>
+            </a:pPr>
+            <a:r>
+              <a:rPr lang="en-US" altLang="en-US" sz="1300">
+                <a:latin typeface="Arial" panose="020B0604020202020204" pitchFamily="34" charset="0"/>
+              </a:rPr>
+              <a:t>app\DataTables\ChildCategoryDataTable.php</a:t>
+            </a:r>
+            <a:endParaRPr kumimoji="0" lang="en-US" altLang="en-US" sz="1300" b="0" i="0" u="none" strike="noStrike" cap="none" normalizeH="0" baseline="0">
+              <a:ln>
+                <a:noFill/>
+              </a:ln>
+              <a:solidFill>
+                <a:schemeClr val="tx1"/>
+              </a:solidFill>
+              <a:effectLst/>
+              <a:latin typeface="Arial" panose="020B0604020202020204" pitchFamily="34" charset="0"/>
+            </a:endParaRPr>
+          </a:p>
+        </p:txBody>
+      </p:sp>
+      <p:pic>
+        <p:nvPicPr>
+          <p:cNvPr id="4" name="Picture 3">
+            <a:extLst>
+              <a:ext uri="{FF2B5EF4-FFF2-40B4-BE49-F238E27FC236}">
+                <a16:creationId xmlns:a16="http://schemas.microsoft.com/office/drawing/2014/main" id="{7C1A28E7-791A-F47F-01FD-1F8B8D3CBA47}"/>
+              </a:ext>
+            </a:extLst>
+          </p:cNvPr>
+          <p:cNvPicPr>
+            <a:picLocks noChangeAspect="1"/>
+          </p:cNvPicPr>
+          <p:nvPr/>
+        </p:nvPicPr>
+        <p:blipFill>
+          <a:blip r:embed="rId2"/>
+          <a:stretch>
+            <a:fillRect/>
+          </a:stretch>
+        </p:blipFill>
+        <p:spPr>
+          <a:xfrm>
+            <a:off x="7844028" y="0"/>
+            <a:ext cx="4347972" cy="6858000"/>
+          </a:xfrm>
+          <a:prstGeom prst="rect">
+            <a:avLst/>
+          </a:prstGeom>
+        </p:spPr>
+      </p:pic>
+    </p:spTree>
+    <p:extLst>
+      <p:ext uri="{BB962C8B-B14F-4D97-AF65-F5344CB8AC3E}">
+        <p14:creationId xmlns:p14="http://schemas.microsoft.com/office/powerpoint/2010/main" val="1861761037"/>
+      </p:ext>
+    </p:extLst>
+  </p:cSld>
+  <p:clrMapOvr>
+    <a:masterClrMapping/>
+  </p:clrMapOvr>
+</p:sld>
+</file>
+
+<file path=ppt/slides/slide7.xml><?xml version="1.0" encoding="utf-8"?>
+<p:sld xmlns:a="http://schemas.openxmlformats.org/drawingml/2006/main" xmlns:r="http://schemas.openxmlformats.org/officeDocument/2006/relationships" xmlns:p="http://schemas.openxmlformats.org/presentationml/2006/main">
+  <p:cSld>
+    <p:spTree>
+      <p:nvGrpSpPr>
+        <p:cNvPr id="1" name="">
+          <a:extLst>
+            <a:ext uri="{FF2B5EF4-FFF2-40B4-BE49-F238E27FC236}">
+              <a16:creationId xmlns:a16="http://schemas.microsoft.com/office/drawing/2014/main" id="{214F5124-0249-119A-B22D-53B26905E43B}"/>
+            </a:ext>
+          </a:extLst>
+        </p:cNvPr>
+        <p:cNvGrpSpPr/>
+        <p:nvPr/>
+      </p:nvGrpSpPr>
+      <p:grpSpPr>
+        <a:xfrm>
+          <a:off x="0" y="0"/>
+          <a:ext cx="0" cy="0"/>
+          <a:chOff x="0" y="0"/>
+          <a:chExt cx="0" cy="0"/>
+        </a:xfrm>
+      </p:grpSpPr>
+      <p:sp>
+        <p:nvSpPr>
+          <p:cNvPr id="3" name="TextBox 2">
+            <a:extLst>
+              <a:ext uri="{FF2B5EF4-FFF2-40B4-BE49-F238E27FC236}">
+                <a16:creationId xmlns:a16="http://schemas.microsoft.com/office/drawing/2014/main" id="{3133FAE4-BD90-5719-56FB-2EB4A3385705}"/>
+              </a:ext>
+            </a:extLst>
+          </p:cNvPr>
+          <p:cNvSpPr txBox="1"/>
+          <p:nvPr/>
+        </p:nvSpPr>
+        <p:spPr>
+          <a:xfrm>
+            <a:off x="217714" y="255046"/>
+            <a:ext cx="11756571" cy="355354"/>
+          </a:xfrm>
+          <a:prstGeom prst="rect">
+            <a:avLst/>
+          </a:prstGeom>
+          <a:noFill/>
+        </p:spPr>
+        <p:txBody>
+          <a:bodyPr wrap="square">
+            <a:spAutoFit/>
+          </a:bodyPr>
+          <a:lstStyle/>
+          <a:p>
+            <a:pPr>
+              <a:lnSpc>
+                <a:spcPct val="150000"/>
+              </a:lnSpc>
+              <a:buNone/>
+            </a:pPr>
+            <a:r>
+              <a:rPr kumimoji="0" lang="en-US" altLang="en-US" sz="1300" b="0" i="0" u="none" strike="noStrike" cap="none" normalizeH="0" baseline="0">
+                <a:ln>
+                  <a:noFill/>
+                </a:ln>
+                <a:solidFill>
+                  <a:schemeClr val="tx1"/>
+                </a:solidFill>
+                <a:effectLst/>
+                <a:latin typeface="Arial" panose="020B0604020202020204" pitchFamily="34" charset="0"/>
+              </a:rPr>
+              <a:t>.</a:t>
+            </a:r>
+          </a:p>
+        </p:txBody>
+      </p:sp>
+      <p:pic>
+        <p:nvPicPr>
+          <p:cNvPr id="4" name="Picture 3">
+            <a:extLst>
+              <a:ext uri="{FF2B5EF4-FFF2-40B4-BE49-F238E27FC236}">
+                <a16:creationId xmlns:a16="http://schemas.microsoft.com/office/drawing/2014/main" id="{8C90E981-BAAA-7C51-ABE0-672D7E70771F}"/>
+              </a:ext>
+            </a:extLst>
+          </p:cNvPr>
+          <p:cNvPicPr>
+            <a:picLocks noChangeAspect="1"/>
+          </p:cNvPicPr>
+          <p:nvPr/>
+        </p:nvPicPr>
+        <p:blipFill>
+          <a:blip r:embed="rId2"/>
+          <a:stretch>
+            <a:fillRect/>
+          </a:stretch>
+        </p:blipFill>
+        <p:spPr>
+          <a:xfrm>
+            <a:off x="0" y="1497594"/>
+            <a:ext cx="12192000" cy="3862812"/>
+          </a:xfrm>
+          <a:prstGeom prst="rect">
+            <a:avLst/>
+          </a:prstGeom>
+          <a:ln w="38100" cap="sq">
+            <a:solidFill>
+              <a:srgbClr val="000000"/>
+            </a:solidFill>
+            <a:prstDash val="solid"/>
+            <a:miter lim="800000"/>
+          </a:ln>
+          <a:effectLst>
+            <a:outerShdw blurRad="50800" dist="38100" dir="2700000" algn="tl" rotWithShape="0">
+              <a:srgbClr val="000000">
+                <a:alpha val="43000"/>
+              </a:srgbClr>
+            </a:outerShdw>
+          </a:effectLst>
+        </p:spPr>
+      </p:pic>
+    </p:spTree>
+    <p:extLst>
+      <p:ext uri="{BB962C8B-B14F-4D97-AF65-F5344CB8AC3E}">
+        <p14:creationId xmlns:p14="http://schemas.microsoft.com/office/powerpoint/2010/main" val="4115978431"/>
+      </p:ext>
+    </p:extLst>
+  </p:cSld>
+  <p:clrMapOvr>
+    <a:masterClrMapping/>
+  </p:clrMapOvr>
+</p:sld>
+</file>
+
+<file path=ppt/slides/slide8.xml><?xml version="1.0" encoding="utf-8"?>
+<p:sld xmlns:a="http://schemas.openxmlformats.org/drawingml/2006/main" xmlns:r="http://schemas.openxmlformats.org/officeDocument/2006/relationships" xmlns:p="http://schemas.openxmlformats.org/presentationml/2006/main">
+  <p:cSld>
+    <p:spTree>
+      <p:nvGrpSpPr>
+        <p:cNvPr id="1" name="">
+          <a:extLst>
+            <a:ext uri="{FF2B5EF4-FFF2-40B4-BE49-F238E27FC236}">
+              <a16:creationId xmlns:a16="http://schemas.microsoft.com/office/drawing/2014/main" id="{7660A603-5986-1B34-2528-BE9E8A100CED}"/>
+            </a:ext>
+          </a:extLst>
+        </p:cNvPr>
+        <p:cNvGrpSpPr/>
+        <p:nvPr/>
+      </p:nvGrpSpPr>
+      <p:grpSpPr>
+        <a:xfrm>
+          <a:off x="0" y="0"/>
+          <a:ext cx="0" cy="0"/>
+          <a:chOff x="0" y="0"/>
+          <a:chExt cx="0" cy="0"/>
+        </a:xfrm>
+      </p:grpSpPr>
+      <p:sp>
+        <p:nvSpPr>
+          <p:cNvPr id="3" name="TextBox 2">
+            <a:extLst>
+              <a:ext uri="{FF2B5EF4-FFF2-40B4-BE49-F238E27FC236}">
+                <a16:creationId xmlns:a16="http://schemas.microsoft.com/office/drawing/2014/main" id="{CE6029C5-447B-E519-1799-25BB3B38A501}"/>
+              </a:ext>
+            </a:extLst>
+          </p:cNvPr>
+          <p:cNvSpPr txBox="1"/>
+          <p:nvPr/>
+        </p:nvSpPr>
+        <p:spPr>
+          <a:xfrm>
+            <a:off x="217714" y="255046"/>
+            <a:ext cx="11756571" cy="355354"/>
+          </a:xfrm>
+          <a:prstGeom prst="rect">
+            <a:avLst/>
+          </a:prstGeom>
+          <a:noFill/>
+        </p:spPr>
+        <p:txBody>
+          <a:bodyPr wrap="square">
+            <a:spAutoFit/>
+          </a:bodyPr>
+          <a:lstStyle/>
+          <a:p>
+            <a:pPr>
+              <a:lnSpc>
+                <a:spcPct val="150000"/>
+              </a:lnSpc>
+              <a:buNone/>
+            </a:pPr>
+            <a:r>
+              <a:rPr kumimoji="0" lang="en-US" altLang="en-US" sz="1300" b="0" i="0" u="none" strike="noStrike" cap="none" normalizeH="0" baseline="0">
+                <a:ln>
+                  <a:noFill/>
+                </a:ln>
+                <a:solidFill>
+                  <a:schemeClr val="tx1"/>
+                </a:solidFill>
+                <a:effectLst/>
+                <a:latin typeface="Arial" panose="020B0604020202020204" pitchFamily="34" charset="0"/>
+              </a:rPr>
+              <a:t>.</a:t>
+            </a:r>
+          </a:p>
+        </p:txBody>
+      </p:sp>
+    </p:spTree>
+    <p:extLst>
+      <p:ext uri="{BB962C8B-B14F-4D97-AF65-F5344CB8AC3E}">
+        <p14:creationId xmlns:p14="http://schemas.microsoft.com/office/powerpoint/2010/main" val="2306544056"/>
       </p:ext>
     </p:extLst>
   </p:cSld>
